--- a/templates/google-slides/nozilla-slides-pitch.pptx
+++ b/templates/google-slides/nozilla-slides-pitch.pptx
@@ -3994,7 +3994,51 @@
       </p:sp>
       <p:sp>
         <p:nvSpPr>
-          <p:cNvPr id="11" name="TextBox 10"/>
+          <p:cNvPr id="11" name="Rectangle 10"/>
+          <p:cNvSpPr/>
+          <p:nvPr/>
+        </p:nvSpPr>
+        <p:spPr>
+          <a:xfrm>
+            <a:off x="2315489" y="3346132"/>
+            <a:ext cx="77152" cy="77152"/>
+          </a:xfrm>
+          <a:prstGeom prst="rect">
+            <a:avLst/>
+          </a:prstGeom>
+          <a:solidFill>
+            <a:srgbClr val="00FF9C"/>
+          </a:solidFill>
+          <a:ln>
+            <a:noFill/>
+          </a:ln>
+          <a:effectLst/>
+        </p:spPr>
+        <p:style>
+          <a:lnRef idx="1">
+            <a:schemeClr val="accent1"/>
+          </a:lnRef>
+          <a:fillRef idx="3">
+            <a:schemeClr val="accent1"/>
+          </a:fillRef>
+          <a:effectRef idx="2">
+            <a:schemeClr val="accent1"/>
+          </a:effectRef>
+          <a:fontRef idx="minor">
+            <a:schemeClr val="lt1"/>
+          </a:fontRef>
+        </p:style>
+        <p:txBody>
+          <a:bodyPr rtlCol="0" anchor="ctr"/>
+          <a:lstStyle/>
+          <a:p>
+            <a:pPr algn="ctr"/>
+          </a:p>
+        </p:txBody>
+      </p:sp>
+      <p:sp>
+        <p:nvSpPr>
+          <p:cNvPr id="12" name="TextBox 11"/>
           <p:cNvSpPr txBox="1"/>
           <p:nvPr/>
         </p:nvSpPr>
@@ -4033,7 +4077,7 @@
       </p:sp>
       <p:sp>
         <p:nvSpPr>
-          <p:cNvPr id="12" name="TextBox 11"/>
+          <p:cNvPr id="13" name="TextBox 12"/>
           <p:cNvSpPr txBox="1"/>
           <p:nvPr/>
         </p:nvSpPr>
@@ -4072,7 +4116,7 @@
       </p:sp>
       <p:sp>
         <p:nvSpPr>
-          <p:cNvPr id="13" name="Rectangle 12"/>
+          <p:cNvPr id="14" name="Rectangle 13"/>
           <p:cNvSpPr/>
           <p:nvPr/>
         </p:nvSpPr>
@@ -4116,7 +4160,7 @@
       </p:sp>
       <p:sp>
         <p:nvSpPr>
-          <p:cNvPr id="14" name="Rectangle 13"/>
+          <p:cNvPr id="15" name="Rectangle 14"/>
           <p:cNvSpPr/>
           <p:nvPr/>
         </p:nvSpPr>
@@ -4162,7 +4206,7 @@
       </p:sp>
       <p:sp>
         <p:nvSpPr>
-          <p:cNvPr id="15" name="Oval 14"/>
+          <p:cNvPr id="16" name="Oval 15"/>
           <p:cNvSpPr/>
           <p:nvPr/>
         </p:nvSpPr>
@@ -4206,7 +4250,7 @@
       </p:sp>
       <p:sp>
         <p:nvSpPr>
-          <p:cNvPr id="16" name="Freeform 15"/>
+          <p:cNvPr id="17" name="Freeform 16"/>
           <p:cNvSpPr/>
           <p:nvPr/>
         </p:nvSpPr>
@@ -4273,7 +4317,51 @@
       </p:sp>
       <p:sp>
         <p:nvSpPr>
-          <p:cNvPr id="17" name="TextBox 16"/>
+          <p:cNvPr id="18" name="Rectangle 17"/>
+          <p:cNvSpPr/>
+          <p:nvPr/>
+        </p:nvSpPr>
+        <p:spPr>
+          <a:xfrm>
+            <a:off x="5054803" y="3346132"/>
+            <a:ext cx="77152" cy="77152"/>
+          </a:xfrm>
+          <a:prstGeom prst="rect">
+            <a:avLst/>
+          </a:prstGeom>
+          <a:solidFill>
+            <a:srgbClr val="00FF9C"/>
+          </a:solidFill>
+          <a:ln>
+            <a:noFill/>
+          </a:ln>
+          <a:effectLst/>
+        </p:spPr>
+        <p:style>
+          <a:lnRef idx="1">
+            <a:schemeClr val="accent1"/>
+          </a:lnRef>
+          <a:fillRef idx="3">
+            <a:schemeClr val="accent1"/>
+          </a:fillRef>
+          <a:effectRef idx="2">
+            <a:schemeClr val="accent1"/>
+          </a:effectRef>
+          <a:fontRef idx="minor">
+            <a:schemeClr val="lt1"/>
+          </a:fontRef>
+        </p:style>
+        <p:txBody>
+          <a:bodyPr rtlCol="0" anchor="ctr"/>
+          <a:lstStyle/>
+          <a:p>
+            <a:pPr algn="ctr"/>
+          </a:p>
+        </p:txBody>
+      </p:sp>
+      <p:sp>
+        <p:nvSpPr>
+          <p:cNvPr id="19" name="TextBox 18"/>
           <p:cNvSpPr txBox="1"/>
           <p:nvPr/>
         </p:nvSpPr>
@@ -4312,7 +4400,7 @@
       </p:sp>
       <p:sp>
         <p:nvSpPr>
-          <p:cNvPr id="18" name="TextBox 17"/>
+          <p:cNvPr id="20" name="TextBox 19"/>
           <p:cNvSpPr txBox="1"/>
           <p:nvPr/>
         </p:nvSpPr>
@@ -4351,7 +4439,7 @@
       </p:sp>
       <p:sp>
         <p:nvSpPr>
-          <p:cNvPr id="19" name="Rectangle 18"/>
+          <p:cNvPr id="21" name="Rectangle 20"/>
           <p:cNvSpPr/>
           <p:nvPr/>
         </p:nvSpPr>
@@ -4395,7 +4483,7 @@
       </p:sp>
       <p:sp>
         <p:nvSpPr>
-          <p:cNvPr id="20" name="Rectangle 19"/>
+          <p:cNvPr id="22" name="Rectangle 21"/>
           <p:cNvSpPr/>
           <p:nvPr/>
         </p:nvSpPr>
@@ -4441,7 +4529,7 @@
       </p:sp>
       <p:sp>
         <p:nvSpPr>
-          <p:cNvPr id="21" name="Oval 20"/>
+          <p:cNvPr id="23" name="Oval 22"/>
           <p:cNvSpPr/>
           <p:nvPr/>
         </p:nvSpPr>
@@ -4485,7 +4573,7 @@
       </p:sp>
       <p:sp>
         <p:nvSpPr>
-          <p:cNvPr id="22" name="Freeform 21"/>
+          <p:cNvPr id="24" name="Freeform 23"/>
           <p:cNvSpPr/>
           <p:nvPr/>
         </p:nvSpPr>
@@ -4552,7 +4640,51 @@
       </p:sp>
       <p:sp>
         <p:nvSpPr>
-          <p:cNvPr id="23" name="TextBox 22"/>
+          <p:cNvPr id="25" name="Rectangle 24"/>
+          <p:cNvSpPr/>
+          <p:nvPr/>
+        </p:nvSpPr>
+        <p:spPr>
+          <a:xfrm>
+            <a:off x="7794117" y="3346132"/>
+            <a:ext cx="77152" cy="77152"/>
+          </a:xfrm>
+          <a:prstGeom prst="rect">
+            <a:avLst/>
+          </a:prstGeom>
+          <a:solidFill>
+            <a:srgbClr val="00FF9C"/>
+          </a:solidFill>
+          <a:ln>
+            <a:noFill/>
+          </a:ln>
+          <a:effectLst/>
+        </p:spPr>
+        <p:style>
+          <a:lnRef idx="1">
+            <a:schemeClr val="accent1"/>
+          </a:lnRef>
+          <a:fillRef idx="3">
+            <a:schemeClr val="accent1"/>
+          </a:fillRef>
+          <a:effectRef idx="2">
+            <a:schemeClr val="accent1"/>
+          </a:effectRef>
+          <a:fontRef idx="minor">
+            <a:schemeClr val="lt1"/>
+          </a:fontRef>
+        </p:style>
+        <p:txBody>
+          <a:bodyPr rtlCol="0" anchor="ctr"/>
+          <a:lstStyle/>
+          <a:p>
+            <a:pPr algn="ctr"/>
+          </a:p>
+        </p:txBody>
+      </p:sp>
+      <p:sp>
+        <p:nvSpPr>
+          <p:cNvPr id="26" name="TextBox 25"/>
           <p:cNvSpPr txBox="1"/>
           <p:nvPr/>
         </p:nvSpPr>
@@ -4591,7 +4723,7 @@
       </p:sp>
       <p:sp>
         <p:nvSpPr>
-          <p:cNvPr id="24" name="TextBox 23"/>
+          <p:cNvPr id="27" name="TextBox 26"/>
           <p:cNvSpPr txBox="1"/>
           <p:nvPr/>
         </p:nvSpPr>
@@ -4630,7 +4762,7 @@
       </p:sp>
       <p:sp>
         <p:nvSpPr>
-          <p:cNvPr id="25" name="Rectangle 24"/>
+          <p:cNvPr id="28" name="Rectangle 27"/>
           <p:cNvSpPr/>
           <p:nvPr/>
         </p:nvSpPr>
@@ -4674,7 +4806,7 @@
       </p:sp>
       <p:sp>
         <p:nvSpPr>
-          <p:cNvPr id="26" name="Rectangle 25"/>
+          <p:cNvPr id="29" name="Rectangle 28"/>
           <p:cNvSpPr/>
           <p:nvPr/>
         </p:nvSpPr>
@@ -4720,7 +4852,7 @@
       </p:sp>
       <p:sp>
         <p:nvSpPr>
-          <p:cNvPr id="27" name="Oval 26"/>
+          <p:cNvPr id="30" name="Oval 29"/>
           <p:cNvSpPr/>
           <p:nvPr/>
         </p:nvSpPr>
@@ -4764,7 +4896,7 @@
       </p:sp>
       <p:sp>
         <p:nvSpPr>
-          <p:cNvPr id="28" name="Freeform 27"/>
+          <p:cNvPr id="31" name="Freeform 30"/>
           <p:cNvSpPr/>
           <p:nvPr/>
         </p:nvSpPr>
@@ -4831,7 +4963,51 @@
       </p:sp>
       <p:sp>
         <p:nvSpPr>
-          <p:cNvPr id="29" name="TextBox 28"/>
+          <p:cNvPr id="32" name="Rectangle 31"/>
+          <p:cNvSpPr/>
+          <p:nvPr/>
+        </p:nvSpPr>
+        <p:spPr>
+          <a:xfrm>
+            <a:off x="10533431" y="3346132"/>
+            <a:ext cx="77152" cy="77152"/>
+          </a:xfrm>
+          <a:prstGeom prst="rect">
+            <a:avLst/>
+          </a:prstGeom>
+          <a:solidFill>
+            <a:srgbClr val="00FF9C"/>
+          </a:solidFill>
+          <a:ln>
+            <a:noFill/>
+          </a:ln>
+          <a:effectLst/>
+        </p:spPr>
+        <p:style>
+          <a:lnRef idx="1">
+            <a:schemeClr val="accent1"/>
+          </a:lnRef>
+          <a:fillRef idx="3">
+            <a:schemeClr val="accent1"/>
+          </a:fillRef>
+          <a:effectRef idx="2">
+            <a:schemeClr val="accent1"/>
+          </a:effectRef>
+          <a:fontRef idx="minor">
+            <a:schemeClr val="lt1"/>
+          </a:fontRef>
+        </p:style>
+        <p:txBody>
+          <a:bodyPr rtlCol="0" anchor="ctr"/>
+          <a:lstStyle/>
+          <a:p>
+            <a:pPr algn="ctr"/>
+          </a:p>
+        </p:txBody>
+      </p:sp>
+      <p:sp>
+        <p:nvSpPr>
+          <p:cNvPr id="33" name="TextBox 32"/>
           <p:cNvSpPr txBox="1"/>
           <p:nvPr/>
         </p:nvSpPr>
@@ -4870,7 +5046,7 @@
       </p:sp>
       <p:sp>
         <p:nvSpPr>
-          <p:cNvPr id="30" name="TextBox 29"/>
+          <p:cNvPr id="34" name="TextBox 33"/>
           <p:cNvSpPr txBox="1"/>
           <p:nvPr/>
         </p:nvSpPr>
@@ -4909,7 +5085,7 @@
       </p:sp>
       <p:sp>
         <p:nvSpPr>
-          <p:cNvPr id="31" name="Rectangle 30"/>
+          <p:cNvPr id="35" name="Rectangle 34"/>
           <p:cNvSpPr/>
           <p:nvPr/>
         </p:nvSpPr>
@@ -4953,7 +5129,7 @@
       </p:sp>
       <p:sp>
         <p:nvSpPr>
-          <p:cNvPr id="32" name="TextBox 31"/>
+          <p:cNvPr id="36" name="TextBox 35"/>
           <p:cNvSpPr txBox="1"/>
           <p:nvPr/>
         </p:nvSpPr>
@@ -4996,7 +5172,7 @@
       </p:sp>
       <p:sp>
         <p:nvSpPr>
-          <p:cNvPr id="33" name="TextBox 32"/>
+          <p:cNvPr id="37" name="TextBox 36"/>
           <p:cNvSpPr txBox="1"/>
           <p:nvPr/>
         </p:nvSpPr>
@@ -6760,8 +6936,8 @@
         </p:nvSpPr>
         <p:spPr>
           <a:xfrm>
-            <a:off x="868680" y="2480310"/>
-            <a:ext cx="548640" cy="502920"/>
+            <a:off x="891540" y="2468880"/>
+            <a:ext cx="502920" cy="480060"/>
           </a:xfrm>
           <a:custGeom>
             <a:avLst/>
@@ -6770,15 +6946,15 @@
             <a:cxnLst/>
             <a:rect l="l" t="t" r="r" b="b"/>
             <a:pathLst>
-              <a:path w="548640" h="502920">
+              <a:path w="502920" h="480060">
                 <a:moveTo>
-                  <a:pt x="274320" y="0"/>
+                  <a:pt x="251460" y="0"/>
                 </a:moveTo>
                 <a:lnTo>
-                  <a:pt x="548640" y="502920"/>
+                  <a:pt x="502920" y="480060"/>
                 </a:lnTo>
                 <a:lnTo>
-                  <a:pt x="0" y="502920"/>
+                  <a:pt x="0" y="480060"/>
                 </a:lnTo>
                 <a:close/>
               </a:path>
@@ -6822,8 +6998,8 @@
         </p:nvCxnSpPr>
         <p:spPr>
           <a:xfrm>
-            <a:off x="1143000" y="2674620"/>
-            <a:ext cx="0" cy="160020"/>
+            <a:off x="1143000" y="2651760"/>
+            <a:ext cx="0" cy="148590"/>
           </a:xfrm>
           <a:prstGeom prst="line">
             <a:avLst/>
@@ -6858,7 +7034,7 @@
         </p:nvSpPr>
         <p:spPr>
           <a:xfrm>
-            <a:off x="1113282" y="2884932"/>
+            <a:off x="1113282" y="2850642"/>
             <a:ext cx="59436" cy="59436"/>
           </a:xfrm>
           <a:prstGeom prst="ellipse">
@@ -6896,7 +7072,51 @@
       </p:sp>
       <p:sp>
         <p:nvSpPr>
-          <p:cNvPr id="10" name="TextBox 9"/>
+          <p:cNvPr id="10" name="Rectangle 9"/>
+          <p:cNvSpPr/>
+          <p:nvPr/>
+        </p:nvSpPr>
+        <p:spPr>
+          <a:xfrm>
+            <a:off x="1394460" y="2994660"/>
+            <a:ext cx="68580" cy="68580"/>
+          </a:xfrm>
+          <a:prstGeom prst="rect">
+            <a:avLst/>
+          </a:prstGeom>
+          <a:solidFill>
+            <a:srgbClr val="00FF9C"/>
+          </a:solidFill>
+          <a:ln>
+            <a:noFill/>
+          </a:ln>
+          <a:effectLst/>
+        </p:spPr>
+        <p:style>
+          <a:lnRef idx="1">
+            <a:schemeClr val="accent1"/>
+          </a:lnRef>
+          <a:fillRef idx="3">
+            <a:schemeClr val="accent1"/>
+          </a:fillRef>
+          <a:effectRef idx="2">
+            <a:schemeClr val="accent1"/>
+          </a:effectRef>
+          <a:fontRef idx="minor">
+            <a:schemeClr val="lt1"/>
+          </a:fontRef>
+        </p:style>
+        <p:txBody>
+          <a:bodyPr rtlCol="0" anchor="ctr"/>
+          <a:lstStyle/>
+          <a:p>
+            <a:pPr algn="ctr"/>
+          </a:p>
+        </p:txBody>
+      </p:sp>
+      <p:sp>
+        <p:nvSpPr>
+          <p:cNvPr id="11" name="TextBox 10"/>
           <p:cNvSpPr txBox="1"/>
           <p:nvPr/>
         </p:nvSpPr>
@@ -6935,7 +7155,7 @@
       </p:sp>
       <p:sp>
         <p:nvSpPr>
-          <p:cNvPr id="11" name="TextBox 10"/>
+          <p:cNvPr id="12" name="TextBox 11"/>
           <p:cNvSpPr txBox="1"/>
           <p:nvPr/>
         </p:nvSpPr>
@@ -6974,7 +7194,7 @@
       </p:sp>
       <p:sp>
         <p:nvSpPr>
-          <p:cNvPr id="12" name="Oval 11"/>
+          <p:cNvPr id="13" name="Oval 12"/>
           <p:cNvSpPr/>
           <p:nvPr/>
         </p:nvSpPr>
@@ -7018,7 +7238,7 @@
       </p:sp>
       <p:cxnSp>
         <p:nvCxnSpPr>
-          <p:cNvPr id="13" name="Connector 12"/>
+          <p:cNvPr id="14" name="Connector 13"/>
           <p:cNvCxnSpPr/>
           <p:nvPr/>
         </p:nvCxnSpPr>
@@ -7054,7 +7274,7 @@
       </p:cxnSp>
       <p:cxnSp>
         <p:nvCxnSpPr>
-          <p:cNvPr id="14" name="Connector 13"/>
+          <p:cNvPr id="15" name="Connector 14"/>
           <p:cNvCxnSpPr/>
           <p:nvPr/>
         </p:nvCxnSpPr>
@@ -7090,7 +7310,51 @@
       </p:cxnSp>
       <p:sp>
         <p:nvSpPr>
-          <p:cNvPr id="15" name="TextBox 14"/>
+          <p:cNvPr id="16" name="Rectangle 15"/>
+          <p:cNvSpPr/>
+          <p:nvPr/>
+        </p:nvSpPr>
+        <p:spPr>
+          <a:xfrm>
+            <a:off x="5092598" y="2994660"/>
+            <a:ext cx="68580" cy="68580"/>
+          </a:xfrm>
+          <a:prstGeom prst="rect">
+            <a:avLst/>
+          </a:prstGeom>
+          <a:solidFill>
+            <a:srgbClr val="00FF9C"/>
+          </a:solidFill>
+          <a:ln>
+            <a:noFill/>
+          </a:ln>
+          <a:effectLst/>
+        </p:spPr>
+        <p:style>
+          <a:lnRef idx="1">
+            <a:schemeClr val="accent1"/>
+          </a:lnRef>
+          <a:fillRef idx="3">
+            <a:schemeClr val="accent1"/>
+          </a:fillRef>
+          <a:effectRef idx="2">
+            <a:schemeClr val="accent1"/>
+          </a:effectRef>
+          <a:fontRef idx="minor">
+            <a:schemeClr val="lt1"/>
+          </a:fontRef>
+        </p:style>
+        <p:txBody>
+          <a:bodyPr rtlCol="0" anchor="ctr"/>
+          <a:lstStyle/>
+          <a:p>
+            <a:pPr algn="ctr"/>
+          </a:p>
+        </p:txBody>
+      </p:sp>
+      <p:sp>
+        <p:nvSpPr>
+          <p:cNvPr id="17" name="TextBox 16"/>
           <p:cNvSpPr txBox="1"/>
           <p:nvPr/>
         </p:nvSpPr>
@@ -7129,7 +7393,7 @@
       </p:sp>
       <p:sp>
         <p:nvSpPr>
-          <p:cNvPr id="16" name="TextBox 15"/>
+          <p:cNvPr id="18" name="TextBox 17"/>
           <p:cNvSpPr txBox="1"/>
           <p:nvPr/>
         </p:nvSpPr>
@@ -7168,7 +7432,7 @@
       </p:sp>
       <p:cxnSp>
         <p:nvCxnSpPr>
-          <p:cNvPr id="17" name="Connector 16"/>
+          <p:cNvPr id="19" name="Connector 18"/>
           <p:cNvCxnSpPr/>
           <p:nvPr/>
         </p:nvCxnSpPr>
@@ -7204,7 +7468,7 @@
       </p:cxnSp>
       <p:cxnSp>
         <p:nvCxnSpPr>
-          <p:cNvPr id="18" name="Connector 17"/>
+          <p:cNvPr id="20" name="Connector 19"/>
           <p:cNvCxnSpPr/>
           <p:nvPr/>
         </p:nvCxnSpPr>
@@ -7240,7 +7504,51 @@
       </p:cxnSp>
       <p:sp>
         <p:nvSpPr>
-          <p:cNvPr id="19" name="TextBox 18"/>
+          <p:cNvPr id="21" name="Rectangle 20"/>
+          <p:cNvSpPr/>
+          <p:nvPr/>
+        </p:nvSpPr>
+        <p:spPr>
+          <a:xfrm>
+            <a:off x="8790737" y="2994660"/>
+            <a:ext cx="68580" cy="68580"/>
+          </a:xfrm>
+          <a:prstGeom prst="rect">
+            <a:avLst/>
+          </a:prstGeom>
+          <a:solidFill>
+            <a:srgbClr val="00FF9C"/>
+          </a:solidFill>
+          <a:ln>
+            <a:noFill/>
+          </a:ln>
+          <a:effectLst/>
+        </p:spPr>
+        <p:style>
+          <a:lnRef idx="1">
+            <a:schemeClr val="accent1"/>
+          </a:lnRef>
+          <a:fillRef idx="3">
+            <a:schemeClr val="accent1"/>
+          </a:fillRef>
+          <a:effectRef idx="2">
+            <a:schemeClr val="accent1"/>
+          </a:effectRef>
+          <a:fontRef idx="minor">
+            <a:schemeClr val="lt1"/>
+          </a:fontRef>
+        </p:style>
+        <p:txBody>
+          <a:bodyPr rtlCol="0" anchor="ctr"/>
+          <a:lstStyle/>
+          <a:p>
+            <a:pPr algn="ctr"/>
+          </a:p>
+        </p:txBody>
+      </p:sp>
+      <p:sp>
+        <p:nvSpPr>
+          <p:cNvPr id="22" name="TextBox 21"/>
           <p:cNvSpPr txBox="1"/>
           <p:nvPr/>
         </p:nvSpPr>
@@ -7279,7 +7587,7 @@
       </p:sp>
       <p:sp>
         <p:nvSpPr>
-          <p:cNvPr id="20" name="TextBox 19"/>
+          <p:cNvPr id="23" name="TextBox 22"/>
           <p:cNvSpPr txBox="1"/>
           <p:nvPr/>
         </p:nvSpPr>
@@ -7318,7 +7626,7 @@
       </p:sp>
       <p:sp>
         <p:nvSpPr>
-          <p:cNvPr id="21" name="Rectangle 20"/>
+          <p:cNvPr id="24" name="Rectangle 23"/>
           <p:cNvSpPr/>
           <p:nvPr/>
         </p:nvSpPr>
@@ -7362,7 +7670,7 @@
       </p:sp>
       <p:sp>
         <p:nvSpPr>
-          <p:cNvPr id="22" name="TextBox 21"/>
+          <p:cNvPr id="25" name="TextBox 24"/>
           <p:cNvSpPr txBox="1"/>
           <p:nvPr/>
         </p:nvSpPr>
@@ -7405,7 +7713,7 @@
       </p:sp>
       <p:sp>
         <p:nvSpPr>
-          <p:cNvPr id="23" name="TextBox 22"/>
+          <p:cNvPr id="26" name="TextBox 25"/>
           <p:cNvSpPr txBox="1"/>
           <p:nvPr/>
         </p:nvSpPr>
@@ -8376,7 +8684,51 @@
       </p:sp>
       <p:sp>
         <p:nvSpPr>
-          <p:cNvPr id="12" name="TextBox 11"/>
+          <p:cNvPr id="12" name="Rectangle 11"/>
+          <p:cNvSpPr/>
+          <p:nvPr/>
+        </p:nvSpPr>
+        <p:spPr>
+          <a:xfrm>
+            <a:off x="2005965" y="3469005"/>
+            <a:ext cx="85725" cy="85725"/>
+          </a:xfrm>
+          <a:prstGeom prst="rect">
+            <a:avLst/>
+          </a:prstGeom>
+          <a:solidFill>
+            <a:srgbClr val="00FF9C"/>
+          </a:solidFill>
+          <a:ln>
+            <a:noFill/>
+          </a:ln>
+          <a:effectLst/>
+        </p:spPr>
+        <p:style>
+          <a:lnRef idx="1">
+            <a:schemeClr val="accent1"/>
+          </a:lnRef>
+          <a:fillRef idx="3">
+            <a:schemeClr val="accent1"/>
+          </a:fillRef>
+          <a:effectRef idx="2">
+            <a:schemeClr val="accent1"/>
+          </a:effectRef>
+          <a:fontRef idx="minor">
+            <a:schemeClr val="lt1"/>
+          </a:fontRef>
+        </p:style>
+        <p:txBody>
+          <a:bodyPr rtlCol="0" anchor="ctr"/>
+          <a:lstStyle/>
+          <a:p>
+            <a:pPr algn="ctr"/>
+          </a:p>
+        </p:txBody>
+      </p:sp>
+      <p:sp>
+        <p:nvSpPr>
+          <p:cNvPr id="13" name="TextBox 12"/>
           <p:cNvSpPr txBox="1"/>
           <p:nvPr/>
         </p:nvSpPr>
@@ -8415,7 +8767,7 @@
       </p:sp>
       <p:sp>
         <p:nvSpPr>
-          <p:cNvPr id="13" name="TextBox 12"/>
+          <p:cNvPr id="14" name="TextBox 13"/>
           <p:cNvSpPr txBox="1"/>
           <p:nvPr/>
         </p:nvSpPr>
@@ -8454,7 +8806,7 @@
       </p:sp>
       <p:sp>
         <p:nvSpPr>
-          <p:cNvPr id="14" name="Rectangle 13"/>
+          <p:cNvPr id="15" name="Rectangle 14"/>
           <p:cNvSpPr/>
           <p:nvPr/>
         </p:nvSpPr>
@@ -8498,7 +8850,7 @@
       </p:sp>
       <p:sp>
         <p:nvSpPr>
-          <p:cNvPr id="15" name="TextBox 14"/>
+          <p:cNvPr id="16" name="TextBox 15"/>
           <p:cNvSpPr txBox="1"/>
           <p:nvPr/>
         </p:nvSpPr>
@@ -8541,7 +8893,7 @@
       </p:sp>
       <p:sp>
         <p:nvSpPr>
-          <p:cNvPr id="16" name="TextBox 15"/>
+          <p:cNvPr id="17" name="TextBox 16"/>
           <p:cNvSpPr txBox="1"/>
           <p:nvPr/>
         </p:nvSpPr>
@@ -11590,7 +11942,51 @@
       </p:sp>
       <p:sp>
         <p:nvSpPr>
-          <p:cNvPr id="10" name="TextBox 9"/>
+          <p:cNvPr id="10" name="Rectangle 9"/>
+          <p:cNvSpPr/>
+          <p:nvPr/>
+        </p:nvSpPr>
+        <p:spPr>
+          <a:xfrm>
+            <a:off x="1714500" y="3314700"/>
+            <a:ext cx="68580" cy="68580"/>
+          </a:xfrm>
+          <a:prstGeom prst="rect">
+            <a:avLst/>
+          </a:prstGeom>
+          <a:solidFill>
+            <a:srgbClr val="00FF9C"/>
+          </a:solidFill>
+          <a:ln>
+            <a:noFill/>
+          </a:ln>
+          <a:effectLst/>
+        </p:spPr>
+        <p:style>
+          <a:lnRef idx="1">
+            <a:schemeClr val="accent1"/>
+          </a:lnRef>
+          <a:fillRef idx="3">
+            <a:schemeClr val="accent1"/>
+          </a:fillRef>
+          <a:effectRef idx="2">
+            <a:schemeClr val="accent1"/>
+          </a:effectRef>
+          <a:fontRef idx="minor">
+            <a:schemeClr val="lt1"/>
+          </a:fontRef>
+        </p:style>
+        <p:txBody>
+          <a:bodyPr rtlCol="0" anchor="ctr"/>
+          <a:lstStyle/>
+          <a:p>
+            <a:pPr algn="ctr"/>
+          </a:p>
+        </p:txBody>
+      </p:sp>
+      <p:sp>
+        <p:nvSpPr>
+          <p:cNvPr id="11" name="TextBox 10"/>
           <p:cNvSpPr txBox="1"/>
           <p:nvPr/>
         </p:nvSpPr>
@@ -11629,7 +12025,7 @@
       </p:sp>
       <p:sp>
         <p:nvSpPr>
-          <p:cNvPr id="11" name="TextBox 10"/>
+          <p:cNvPr id="12" name="TextBox 11"/>
           <p:cNvSpPr txBox="1"/>
           <p:nvPr/>
         </p:nvSpPr>
@@ -11668,7 +12064,7 @@
       </p:sp>
       <p:sp>
         <p:nvSpPr>
-          <p:cNvPr id="12" name="Rectangle 11"/>
+          <p:cNvPr id="13" name="Rectangle 12"/>
           <p:cNvSpPr/>
           <p:nvPr/>
         </p:nvSpPr>
@@ -11712,7 +12108,7 @@
       </p:sp>
       <p:sp>
         <p:nvSpPr>
-          <p:cNvPr id="13" name="Rectangle 12"/>
+          <p:cNvPr id="14" name="Rectangle 13"/>
           <p:cNvSpPr/>
           <p:nvPr/>
         </p:nvSpPr>
@@ -11758,7 +12154,7 @@
       </p:sp>
       <p:sp>
         <p:nvSpPr>
-          <p:cNvPr id="14" name="Oval 13"/>
+          <p:cNvPr id="15" name="Oval 14"/>
           <p:cNvSpPr/>
           <p:nvPr/>
         </p:nvSpPr>
@@ -11802,7 +12198,7 @@
       </p:sp>
       <p:sp>
         <p:nvSpPr>
-          <p:cNvPr id="15" name="Oval 14"/>
+          <p:cNvPr id="16" name="Oval 15"/>
           <p:cNvSpPr/>
           <p:nvPr/>
         </p:nvSpPr>
@@ -11846,7 +12242,7 @@
       </p:sp>
       <p:cxnSp>
         <p:nvCxnSpPr>
-          <p:cNvPr id="16" name="Connector 15"/>
+          <p:cNvPr id="17" name="Connector 16"/>
           <p:cNvCxnSpPr/>
           <p:nvPr/>
         </p:nvCxnSpPr>
@@ -11854,42 +12250,6 @@
           <a:xfrm>
             <a:off x="5332628" y="3063240"/>
             <a:ext cx="68580" cy="0"/>
-          </a:xfrm>
-          <a:prstGeom prst="line">
-            <a:avLst/>
-          </a:prstGeom>
-          <a:ln w="45720">
-            <a:solidFill>
-              <a:srgbClr val="000000"/>
-            </a:solidFill>
-          </a:ln>
-          <a:effectLst/>
-        </p:spPr>
-        <p:style>
-          <a:lnRef idx="2">
-            <a:schemeClr val="accent1"/>
-          </a:lnRef>
-          <a:fillRef idx="0">
-            <a:schemeClr val="accent1"/>
-          </a:fillRef>
-          <a:effectRef idx="1">
-            <a:schemeClr val="accent1"/>
-          </a:effectRef>
-          <a:fontRef idx="minor">
-            <a:schemeClr val="tx1"/>
-          </a:fontRef>
-        </p:style>
-      </p:cxnSp>
-      <p:cxnSp>
-        <p:nvCxnSpPr>
-          <p:cNvPr id="17" name="Connector 16"/>
-          <p:cNvCxnSpPr/>
-          <p:nvPr/>
-        </p:nvCxnSpPr>
-        <p:spPr>
-          <a:xfrm>
-            <a:off x="5161178" y="3234690"/>
-            <a:ext cx="0" cy="68580"/>
           </a:xfrm>
           <a:prstGeom prst="line">
             <a:avLst/>
@@ -11923,9 +12283,9 @@
           <p:nvPr/>
         </p:nvCxnSpPr>
         <p:spPr>
-          <a:xfrm flipH="1">
-            <a:off x="4921148" y="3063240"/>
-            <a:ext cx="68580" cy="0"/>
+          <a:xfrm>
+            <a:off x="5161178" y="3234690"/>
+            <a:ext cx="0" cy="68580"/>
           </a:xfrm>
           <a:prstGeom prst="line">
             <a:avLst/>
@@ -11959,9 +12319,9 @@
           <p:nvPr/>
         </p:nvCxnSpPr>
         <p:spPr>
-          <a:xfrm flipV="1">
-            <a:off x="5161178" y="2823210"/>
-            <a:ext cx="0" cy="68580"/>
+          <a:xfrm flipH="1">
+            <a:off x="4921148" y="3063240"/>
+            <a:ext cx="68580" cy="0"/>
           </a:xfrm>
           <a:prstGeom prst="line">
             <a:avLst/>
@@ -11995,9 +12355,9 @@
           <p:nvPr/>
         </p:nvCxnSpPr>
         <p:spPr>
-          <a:xfrm>
-            <a:off x="5282336" y="3184398"/>
-            <a:ext cx="50292" cy="50292"/>
+          <a:xfrm flipV="1">
+            <a:off x="5161178" y="2823210"/>
+            <a:ext cx="0" cy="68580"/>
           </a:xfrm>
           <a:prstGeom prst="line">
             <a:avLst/>
@@ -12031,8 +12391,8 @@
           <p:nvPr/>
         </p:nvCxnSpPr>
         <p:spPr>
-          <a:xfrm flipH="1">
-            <a:off x="4989728" y="3184398"/>
+          <a:xfrm>
+            <a:off x="5282336" y="3184398"/>
             <a:ext cx="50292" cy="50292"/>
           </a:xfrm>
           <a:prstGeom prst="line">
@@ -12067,8 +12427,8 @@
           <p:nvPr/>
         </p:nvCxnSpPr>
         <p:spPr>
-          <a:xfrm flipH="1" flipV="1">
-            <a:off x="4989728" y="2891790"/>
+          <a:xfrm flipH="1">
+            <a:off x="4989728" y="3184398"/>
             <a:ext cx="50292" cy="50292"/>
           </a:xfrm>
           <a:prstGeom prst="line">
@@ -12103,8 +12463,8 @@
           <p:nvPr/>
         </p:nvCxnSpPr>
         <p:spPr>
-          <a:xfrm flipV="1">
-            <a:off x="5282336" y="2891790"/>
+          <a:xfrm flipH="1" flipV="1">
+            <a:off x="4989728" y="2891790"/>
             <a:ext cx="50292" cy="50292"/>
           </a:xfrm>
           <a:prstGeom prst="line">
@@ -12132,9 +12492,89 @@
           </a:fontRef>
         </p:style>
       </p:cxnSp>
-      <p:sp>
-        <p:nvSpPr>
-          <p:cNvPr id="24" name="TextBox 23"/>
+      <p:cxnSp>
+        <p:nvCxnSpPr>
+          <p:cNvPr id="24" name="Connector 23"/>
+          <p:cNvCxnSpPr/>
+          <p:nvPr/>
+        </p:nvCxnSpPr>
+        <p:spPr>
+          <a:xfrm flipV="1">
+            <a:off x="5282336" y="2891790"/>
+            <a:ext cx="50292" cy="50292"/>
+          </a:xfrm>
+          <a:prstGeom prst="line">
+            <a:avLst/>
+          </a:prstGeom>
+          <a:ln w="45720">
+            <a:solidFill>
+              <a:srgbClr val="000000"/>
+            </a:solidFill>
+          </a:ln>
+          <a:effectLst/>
+        </p:spPr>
+        <p:style>
+          <a:lnRef idx="2">
+            <a:schemeClr val="accent1"/>
+          </a:lnRef>
+          <a:fillRef idx="0">
+            <a:schemeClr val="accent1"/>
+          </a:fillRef>
+          <a:effectRef idx="1">
+            <a:schemeClr val="accent1"/>
+          </a:effectRef>
+          <a:fontRef idx="minor">
+            <a:schemeClr val="tx1"/>
+          </a:fontRef>
+        </p:style>
+      </p:cxnSp>
+      <p:sp>
+        <p:nvSpPr>
+          <p:cNvPr id="25" name="Rectangle 24"/>
+          <p:cNvSpPr/>
+          <p:nvPr/>
+        </p:nvSpPr>
+        <p:spPr>
+          <a:xfrm>
+            <a:off x="5412638" y="3314700"/>
+            <a:ext cx="68580" cy="68580"/>
+          </a:xfrm>
+          <a:prstGeom prst="rect">
+            <a:avLst/>
+          </a:prstGeom>
+          <a:solidFill>
+            <a:srgbClr val="00FF9C"/>
+          </a:solidFill>
+          <a:ln>
+            <a:noFill/>
+          </a:ln>
+          <a:effectLst/>
+        </p:spPr>
+        <p:style>
+          <a:lnRef idx="1">
+            <a:schemeClr val="accent1"/>
+          </a:lnRef>
+          <a:fillRef idx="3">
+            <a:schemeClr val="accent1"/>
+          </a:fillRef>
+          <a:effectRef idx="2">
+            <a:schemeClr val="accent1"/>
+          </a:effectRef>
+          <a:fontRef idx="minor">
+            <a:schemeClr val="lt1"/>
+          </a:fontRef>
+        </p:style>
+        <p:txBody>
+          <a:bodyPr rtlCol="0" anchor="ctr"/>
+          <a:lstStyle/>
+          <a:p>
+            <a:pPr algn="ctr"/>
+          </a:p>
+        </p:txBody>
+      </p:sp>
+      <p:sp>
+        <p:nvSpPr>
+          <p:cNvPr id="26" name="TextBox 25"/>
           <p:cNvSpPr txBox="1"/>
           <p:nvPr/>
         </p:nvSpPr>
@@ -12173,7 +12613,7 @@
       </p:sp>
       <p:sp>
         <p:nvSpPr>
-          <p:cNvPr id="25" name="TextBox 24"/>
+          <p:cNvPr id="27" name="TextBox 26"/>
           <p:cNvSpPr txBox="1"/>
           <p:nvPr/>
         </p:nvSpPr>
@@ -12212,7 +12652,7 @@
       </p:sp>
       <p:sp>
         <p:nvSpPr>
-          <p:cNvPr id="26" name="Rectangle 25"/>
+          <p:cNvPr id="28" name="Rectangle 27"/>
           <p:cNvSpPr/>
           <p:nvPr/>
         </p:nvSpPr>
@@ -12256,7 +12696,7 @@
       </p:sp>
       <p:sp>
         <p:nvSpPr>
-          <p:cNvPr id="27" name="Rectangle 26"/>
+          <p:cNvPr id="29" name="Rectangle 28"/>
           <p:cNvSpPr/>
           <p:nvPr/>
         </p:nvSpPr>
@@ -12302,7 +12742,7 @@
       </p:sp>
       <p:sp>
         <p:nvSpPr>
-          <p:cNvPr id="28" name="Freeform 27"/>
+          <p:cNvPr id="30" name="Freeform 29"/>
           <p:cNvSpPr/>
           <p:nvPr/>
         </p:nvSpPr>
@@ -12370,7 +12810,7 @@
       </p:sp>
       <p:sp>
         <p:nvSpPr>
-          <p:cNvPr id="29" name="Freeform 28"/>
+          <p:cNvPr id="31" name="Freeform 30"/>
           <p:cNvSpPr/>
           <p:nvPr/>
         </p:nvSpPr>
@@ -12431,7 +12871,7 @@
       </p:sp>
       <p:sp>
         <p:nvSpPr>
-          <p:cNvPr id="30" name="Freeform 29"/>
+          <p:cNvPr id="32" name="Freeform 31"/>
           <p:cNvSpPr/>
           <p:nvPr/>
         </p:nvSpPr>
@@ -12492,7 +12932,7 @@
       </p:sp>
       <p:sp>
         <p:nvSpPr>
-          <p:cNvPr id="31" name="Oval 30"/>
+          <p:cNvPr id="33" name="Oval 32"/>
           <p:cNvSpPr/>
           <p:nvPr/>
         </p:nvSpPr>
@@ -12536,7 +12976,51 @@
       </p:sp>
       <p:sp>
         <p:nvSpPr>
-          <p:cNvPr id="32" name="TextBox 31"/>
+          <p:cNvPr id="34" name="Rectangle 33"/>
+          <p:cNvSpPr/>
+          <p:nvPr/>
+        </p:nvSpPr>
+        <p:spPr>
+          <a:xfrm>
+            <a:off x="9110777" y="3314700"/>
+            <a:ext cx="68580" cy="68580"/>
+          </a:xfrm>
+          <a:prstGeom prst="rect">
+            <a:avLst/>
+          </a:prstGeom>
+          <a:solidFill>
+            <a:srgbClr val="00FF9C"/>
+          </a:solidFill>
+          <a:ln>
+            <a:noFill/>
+          </a:ln>
+          <a:effectLst/>
+        </p:spPr>
+        <p:style>
+          <a:lnRef idx="1">
+            <a:schemeClr val="accent1"/>
+          </a:lnRef>
+          <a:fillRef idx="3">
+            <a:schemeClr val="accent1"/>
+          </a:fillRef>
+          <a:effectRef idx="2">
+            <a:schemeClr val="accent1"/>
+          </a:effectRef>
+          <a:fontRef idx="minor">
+            <a:schemeClr val="lt1"/>
+          </a:fontRef>
+        </p:style>
+        <p:txBody>
+          <a:bodyPr rtlCol="0" anchor="ctr"/>
+          <a:lstStyle/>
+          <a:p>
+            <a:pPr algn="ctr"/>
+          </a:p>
+        </p:txBody>
+      </p:sp>
+      <p:sp>
+        <p:nvSpPr>
+          <p:cNvPr id="35" name="TextBox 34"/>
           <p:cNvSpPr txBox="1"/>
           <p:nvPr/>
         </p:nvSpPr>
@@ -12575,7 +13059,7 @@
       </p:sp>
       <p:sp>
         <p:nvSpPr>
-          <p:cNvPr id="33" name="TextBox 32"/>
+          <p:cNvPr id="36" name="TextBox 35"/>
           <p:cNvSpPr txBox="1"/>
           <p:nvPr/>
         </p:nvSpPr>
@@ -12614,7 +13098,7 @@
       </p:sp>
       <p:sp>
         <p:nvSpPr>
-          <p:cNvPr id="34" name="Rectangle 33"/>
+          <p:cNvPr id="37" name="Rectangle 36"/>
           <p:cNvSpPr/>
           <p:nvPr/>
         </p:nvSpPr>
@@ -12658,7 +13142,7 @@
       </p:sp>
       <p:sp>
         <p:nvSpPr>
-          <p:cNvPr id="35" name="TextBox 34"/>
+          <p:cNvPr id="38" name="TextBox 37"/>
           <p:cNvSpPr txBox="1"/>
           <p:nvPr/>
         </p:nvSpPr>
@@ -12701,7 +13185,7 @@
       </p:sp>
       <p:sp>
         <p:nvSpPr>
-          <p:cNvPr id="36" name="TextBox 35"/>
+          <p:cNvPr id="39" name="TextBox 38"/>
           <p:cNvSpPr txBox="1"/>
           <p:nvPr/>
         </p:nvSpPr>

--- a/templates/google-slides/nozilla-slides-pitch.pptx
+++ b/templates/google-slides/nozilla-slides-pitch.pptx
@@ -3994,7 +3994,51 @@
       </p:sp>
       <p:sp>
         <p:nvSpPr>
-          <p:cNvPr id="11" name="TextBox 10"/>
+          <p:cNvPr id="11" name="Rectangle 10"/>
+          <p:cNvSpPr/>
+          <p:nvPr/>
+        </p:nvSpPr>
+        <p:spPr>
+          <a:xfrm>
+            <a:off x="2315489" y="3346132"/>
+            <a:ext cx="77152" cy="77152"/>
+          </a:xfrm>
+          <a:prstGeom prst="rect">
+            <a:avLst/>
+          </a:prstGeom>
+          <a:solidFill>
+            <a:srgbClr val="00FF9C"/>
+          </a:solidFill>
+          <a:ln>
+            <a:noFill/>
+          </a:ln>
+          <a:effectLst/>
+        </p:spPr>
+        <p:style>
+          <a:lnRef idx="1">
+            <a:schemeClr val="accent1"/>
+          </a:lnRef>
+          <a:fillRef idx="3">
+            <a:schemeClr val="accent1"/>
+          </a:fillRef>
+          <a:effectRef idx="2">
+            <a:schemeClr val="accent1"/>
+          </a:effectRef>
+          <a:fontRef idx="minor">
+            <a:schemeClr val="lt1"/>
+          </a:fontRef>
+        </p:style>
+        <p:txBody>
+          <a:bodyPr rtlCol="0" anchor="ctr"/>
+          <a:lstStyle/>
+          <a:p>
+            <a:pPr algn="ctr"/>
+          </a:p>
+        </p:txBody>
+      </p:sp>
+      <p:sp>
+        <p:nvSpPr>
+          <p:cNvPr id="12" name="TextBox 11"/>
           <p:cNvSpPr txBox="1"/>
           <p:nvPr/>
         </p:nvSpPr>
@@ -4033,7 +4077,7 @@
       </p:sp>
       <p:sp>
         <p:nvSpPr>
-          <p:cNvPr id="12" name="TextBox 11"/>
+          <p:cNvPr id="13" name="TextBox 12"/>
           <p:cNvSpPr txBox="1"/>
           <p:nvPr/>
         </p:nvSpPr>
@@ -4072,7 +4116,7 @@
       </p:sp>
       <p:sp>
         <p:nvSpPr>
-          <p:cNvPr id="13" name="Rectangle 12"/>
+          <p:cNvPr id="14" name="Rectangle 13"/>
           <p:cNvSpPr/>
           <p:nvPr/>
         </p:nvSpPr>
@@ -4116,7 +4160,7 @@
       </p:sp>
       <p:sp>
         <p:nvSpPr>
-          <p:cNvPr id="14" name="Rectangle 13"/>
+          <p:cNvPr id="15" name="Rectangle 14"/>
           <p:cNvSpPr/>
           <p:nvPr/>
         </p:nvSpPr>
@@ -4162,7 +4206,7 @@
       </p:sp>
       <p:sp>
         <p:nvSpPr>
-          <p:cNvPr id="15" name="Oval 14"/>
+          <p:cNvPr id="16" name="Oval 15"/>
           <p:cNvSpPr/>
           <p:nvPr/>
         </p:nvSpPr>
@@ -4206,7 +4250,7 @@
       </p:sp>
       <p:sp>
         <p:nvSpPr>
-          <p:cNvPr id="16" name="Freeform 15"/>
+          <p:cNvPr id="17" name="Freeform 16"/>
           <p:cNvSpPr/>
           <p:nvPr/>
         </p:nvSpPr>
@@ -4273,7 +4317,51 @@
       </p:sp>
       <p:sp>
         <p:nvSpPr>
-          <p:cNvPr id="17" name="TextBox 16"/>
+          <p:cNvPr id="18" name="Rectangle 17"/>
+          <p:cNvSpPr/>
+          <p:nvPr/>
+        </p:nvSpPr>
+        <p:spPr>
+          <a:xfrm>
+            <a:off x="5054803" y="3346132"/>
+            <a:ext cx="77152" cy="77152"/>
+          </a:xfrm>
+          <a:prstGeom prst="rect">
+            <a:avLst/>
+          </a:prstGeom>
+          <a:solidFill>
+            <a:srgbClr val="00FF9C"/>
+          </a:solidFill>
+          <a:ln>
+            <a:noFill/>
+          </a:ln>
+          <a:effectLst/>
+        </p:spPr>
+        <p:style>
+          <a:lnRef idx="1">
+            <a:schemeClr val="accent1"/>
+          </a:lnRef>
+          <a:fillRef idx="3">
+            <a:schemeClr val="accent1"/>
+          </a:fillRef>
+          <a:effectRef idx="2">
+            <a:schemeClr val="accent1"/>
+          </a:effectRef>
+          <a:fontRef idx="minor">
+            <a:schemeClr val="lt1"/>
+          </a:fontRef>
+        </p:style>
+        <p:txBody>
+          <a:bodyPr rtlCol="0" anchor="ctr"/>
+          <a:lstStyle/>
+          <a:p>
+            <a:pPr algn="ctr"/>
+          </a:p>
+        </p:txBody>
+      </p:sp>
+      <p:sp>
+        <p:nvSpPr>
+          <p:cNvPr id="19" name="TextBox 18"/>
           <p:cNvSpPr txBox="1"/>
           <p:nvPr/>
         </p:nvSpPr>
@@ -4312,7 +4400,7 @@
       </p:sp>
       <p:sp>
         <p:nvSpPr>
-          <p:cNvPr id="18" name="TextBox 17"/>
+          <p:cNvPr id="20" name="TextBox 19"/>
           <p:cNvSpPr txBox="1"/>
           <p:nvPr/>
         </p:nvSpPr>
@@ -4351,7 +4439,7 @@
       </p:sp>
       <p:sp>
         <p:nvSpPr>
-          <p:cNvPr id="19" name="Rectangle 18"/>
+          <p:cNvPr id="21" name="Rectangle 20"/>
           <p:cNvSpPr/>
           <p:nvPr/>
         </p:nvSpPr>
@@ -4395,7 +4483,7 @@
       </p:sp>
       <p:sp>
         <p:nvSpPr>
-          <p:cNvPr id="20" name="Rectangle 19"/>
+          <p:cNvPr id="22" name="Rectangle 21"/>
           <p:cNvSpPr/>
           <p:nvPr/>
         </p:nvSpPr>
@@ -4441,7 +4529,7 @@
       </p:sp>
       <p:sp>
         <p:nvSpPr>
-          <p:cNvPr id="21" name="Oval 20"/>
+          <p:cNvPr id="23" name="Oval 22"/>
           <p:cNvSpPr/>
           <p:nvPr/>
         </p:nvSpPr>
@@ -4485,7 +4573,7 @@
       </p:sp>
       <p:sp>
         <p:nvSpPr>
-          <p:cNvPr id="22" name="Freeform 21"/>
+          <p:cNvPr id="24" name="Freeform 23"/>
           <p:cNvSpPr/>
           <p:nvPr/>
         </p:nvSpPr>
@@ -4552,7 +4640,51 @@
       </p:sp>
       <p:sp>
         <p:nvSpPr>
-          <p:cNvPr id="23" name="TextBox 22"/>
+          <p:cNvPr id="25" name="Rectangle 24"/>
+          <p:cNvSpPr/>
+          <p:nvPr/>
+        </p:nvSpPr>
+        <p:spPr>
+          <a:xfrm>
+            <a:off x="7794117" y="3346132"/>
+            <a:ext cx="77152" cy="77152"/>
+          </a:xfrm>
+          <a:prstGeom prst="rect">
+            <a:avLst/>
+          </a:prstGeom>
+          <a:solidFill>
+            <a:srgbClr val="00FF9C"/>
+          </a:solidFill>
+          <a:ln>
+            <a:noFill/>
+          </a:ln>
+          <a:effectLst/>
+        </p:spPr>
+        <p:style>
+          <a:lnRef idx="1">
+            <a:schemeClr val="accent1"/>
+          </a:lnRef>
+          <a:fillRef idx="3">
+            <a:schemeClr val="accent1"/>
+          </a:fillRef>
+          <a:effectRef idx="2">
+            <a:schemeClr val="accent1"/>
+          </a:effectRef>
+          <a:fontRef idx="minor">
+            <a:schemeClr val="lt1"/>
+          </a:fontRef>
+        </p:style>
+        <p:txBody>
+          <a:bodyPr rtlCol="0" anchor="ctr"/>
+          <a:lstStyle/>
+          <a:p>
+            <a:pPr algn="ctr"/>
+          </a:p>
+        </p:txBody>
+      </p:sp>
+      <p:sp>
+        <p:nvSpPr>
+          <p:cNvPr id="26" name="TextBox 25"/>
           <p:cNvSpPr txBox="1"/>
           <p:nvPr/>
         </p:nvSpPr>
@@ -4591,7 +4723,7 @@
       </p:sp>
       <p:sp>
         <p:nvSpPr>
-          <p:cNvPr id="24" name="TextBox 23"/>
+          <p:cNvPr id="27" name="TextBox 26"/>
           <p:cNvSpPr txBox="1"/>
           <p:nvPr/>
         </p:nvSpPr>
@@ -4630,7 +4762,7 @@
       </p:sp>
       <p:sp>
         <p:nvSpPr>
-          <p:cNvPr id="25" name="Rectangle 24"/>
+          <p:cNvPr id="28" name="Rectangle 27"/>
           <p:cNvSpPr/>
           <p:nvPr/>
         </p:nvSpPr>
@@ -4674,7 +4806,7 @@
       </p:sp>
       <p:sp>
         <p:nvSpPr>
-          <p:cNvPr id="26" name="Rectangle 25"/>
+          <p:cNvPr id="29" name="Rectangle 28"/>
           <p:cNvSpPr/>
           <p:nvPr/>
         </p:nvSpPr>
@@ -4720,7 +4852,7 @@
       </p:sp>
       <p:sp>
         <p:nvSpPr>
-          <p:cNvPr id="27" name="Oval 26"/>
+          <p:cNvPr id="30" name="Oval 29"/>
           <p:cNvSpPr/>
           <p:nvPr/>
         </p:nvSpPr>
@@ -4764,7 +4896,7 @@
       </p:sp>
       <p:sp>
         <p:nvSpPr>
-          <p:cNvPr id="28" name="Freeform 27"/>
+          <p:cNvPr id="31" name="Freeform 30"/>
           <p:cNvSpPr/>
           <p:nvPr/>
         </p:nvSpPr>
@@ -4831,7 +4963,51 @@
       </p:sp>
       <p:sp>
         <p:nvSpPr>
-          <p:cNvPr id="29" name="TextBox 28"/>
+          <p:cNvPr id="32" name="Rectangle 31"/>
+          <p:cNvSpPr/>
+          <p:nvPr/>
+        </p:nvSpPr>
+        <p:spPr>
+          <a:xfrm>
+            <a:off x="10533431" y="3346132"/>
+            <a:ext cx="77152" cy="77152"/>
+          </a:xfrm>
+          <a:prstGeom prst="rect">
+            <a:avLst/>
+          </a:prstGeom>
+          <a:solidFill>
+            <a:srgbClr val="00FF9C"/>
+          </a:solidFill>
+          <a:ln>
+            <a:noFill/>
+          </a:ln>
+          <a:effectLst/>
+        </p:spPr>
+        <p:style>
+          <a:lnRef idx="1">
+            <a:schemeClr val="accent1"/>
+          </a:lnRef>
+          <a:fillRef idx="3">
+            <a:schemeClr val="accent1"/>
+          </a:fillRef>
+          <a:effectRef idx="2">
+            <a:schemeClr val="accent1"/>
+          </a:effectRef>
+          <a:fontRef idx="minor">
+            <a:schemeClr val="lt1"/>
+          </a:fontRef>
+        </p:style>
+        <p:txBody>
+          <a:bodyPr rtlCol="0" anchor="ctr"/>
+          <a:lstStyle/>
+          <a:p>
+            <a:pPr algn="ctr"/>
+          </a:p>
+        </p:txBody>
+      </p:sp>
+      <p:sp>
+        <p:nvSpPr>
+          <p:cNvPr id="33" name="TextBox 32"/>
           <p:cNvSpPr txBox="1"/>
           <p:nvPr/>
         </p:nvSpPr>
@@ -4870,7 +5046,7 @@
       </p:sp>
       <p:sp>
         <p:nvSpPr>
-          <p:cNvPr id="30" name="TextBox 29"/>
+          <p:cNvPr id="34" name="TextBox 33"/>
           <p:cNvSpPr txBox="1"/>
           <p:nvPr/>
         </p:nvSpPr>
@@ -4909,7 +5085,7 @@
       </p:sp>
       <p:sp>
         <p:nvSpPr>
-          <p:cNvPr id="31" name="Rectangle 30"/>
+          <p:cNvPr id="35" name="Rectangle 34"/>
           <p:cNvSpPr/>
           <p:nvPr/>
         </p:nvSpPr>
@@ -4953,7 +5129,7 @@
       </p:sp>
       <p:sp>
         <p:nvSpPr>
-          <p:cNvPr id="32" name="TextBox 31"/>
+          <p:cNvPr id="36" name="TextBox 35"/>
           <p:cNvSpPr txBox="1"/>
           <p:nvPr/>
         </p:nvSpPr>
@@ -4996,7 +5172,7 @@
       </p:sp>
       <p:sp>
         <p:nvSpPr>
-          <p:cNvPr id="33" name="TextBox 32"/>
+          <p:cNvPr id="37" name="TextBox 36"/>
           <p:cNvSpPr txBox="1"/>
           <p:nvPr/>
         </p:nvSpPr>
@@ -6896,7 +7072,51 @@
       </p:sp>
       <p:sp>
         <p:nvSpPr>
-          <p:cNvPr id="10" name="TextBox 9"/>
+          <p:cNvPr id="10" name="Rectangle 9"/>
+          <p:cNvSpPr/>
+          <p:nvPr/>
+        </p:nvSpPr>
+        <p:spPr>
+          <a:xfrm>
+            <a:off x="1394460" y="2994660"/>
+            <a:ext cx="68580" cy="68580"/>
+          </a:xfrm>
+          <a:prstGeom prst="rect">
+            <a:avLst/>
+          </a:prstGeom>
+          <a:solidFill>
+            <a:srgbClr val="00FF9C"/>
+          </a:solidFill>
+          <a:ln>
+            <a:noFill/>
+          </a:ln>
+          <a:effectLst/>
+        </p:spPr>
+        <p:style>
+          <a:lnRef idx="1">
+            <a:schemeClr val="accent1"/>
+          </a:lnRef>
+          <a:fillRef idx="3">
+            <a:schemeClr val="accent1"/>
+          </a:fillRef>
+          <a:effectRef idx="2">
+            <a:schemeClr val="accent1"/>
+          </a:effectRef>
+          <a:fontRef idx="minor">
+            <a:schemeClr val="lt1"/>
+          </a:fontRef>
+        </p:style>
+        <p:txBody>
+          <a:bodyPr rtlCol="0" anchor="ctr"/>
+          <a:lstStyle/>
+          <a:p>
+            <a:pPr algn="ctr"/>
+          </a:p>
+        </p:txBody>
+      </p:sp>
+      <p:sp>
+        <p:nvSpPr>
+          <p:cNvPr id="11" name="TextBox 10"/>
           <p:cNvSpPr txBox="1"/>
           <p:nvPr/>
         </p:nvSpPr>
@@ -6935,7 +7155,7 @@
       </p:sp>
       <p:sp>
         <p:nvSpPr>
-          <p:cNvPr id="11" name="TextBox 10"/>
+          <p:cNvPr id="12" name="TextBox 11"/>
           <p:cNvSpPr txBox="1"/>
           <p:nvPr/>
         </p:nvSpPr>
@@ -6974,7 +7194,7 @@
       </p:sp>
       <p:sp>
         <p:nvSpPr>
-          <p:cNvPr id="12" name="Oval 11"/>
+          <p:cNvPr id="13" name="Oval 12"/>
           <p:cNvSpPr/>
           <p:nvPr/>
         </p:nvSpPr>
@@ -7018,7 +7238,7 @@
       </p:sp>
       <p:cxnSp>
         <p:nvCxnSpPr>
-          <p:cNvPr id="13" name="Connector 12"/>
+          <p:cNvPr id="14" name="Connector 13"/>
           <p:cNvCxnSpPr/>
           <p:nvPr/>
         </p:nvCxnSpPr>
@@ -7054,7 +7274,7 @@
       </p:cxnSp>
       <p:cxnSp>
         <p:nvCxnSpPr>
-          <p:cNvPr id="14" name="Connector 13"/>
+          <p:cNvPr id="15" name="Connector 14"/>
           <p:cNvCxnSpPr/>
           <p:nvPr/>
         </p:nvCxnSpPr>
@@ -7090,7 +7310,51 @@
       </p:cxnSp>
       <p:sp>
         <p:nvSpPr>
-          <p:cNvPr id="15" name="TextBox 14"/>
+          <p:cNvPr id="16" name="Rectangle 15"/>
+          <p:cNvSpPr/>
+          <p:nvPr/>
+        </p:nvSpPr>
+        <p:spPr>
+          <a:xfrm>
+            <a:off x="5092598" y="2994660"/>
+            <a:ext cx="68580" cy="68580"/>
+          </a:xfrm>
+          <a:prstGeom prst="rect">
+            <a:avLst/>
+          </a:prstGeom>
+          <a:solidFill>
+            <a:srgbClr val="00FF9C"/>
+          </a:solidFill>
+          <a:ln>
+            <a:noFill/>
+          </a:ln>
+          <a:effectLst/>
+        </p:spPr>
+        <p:style>
+          <a:lnRef idx="1">
+            <a:schemeClr val="accent1"/>
+          </a:lnRef>
+          <a:fillRef idx="3">
+            <a:schemeClr val="accent1"/>
+          </a:fillRef>
+          <a:effectRef idx="2">
+            <a:schemeClr val="accent1"/>
+          </a:effectRef>
+          <a:fontRef idx="minor">
+            <a:schemeClr val="lt1"/>
+          </a:fontRef>
+        </p:style>
+        <p:txBody>
+          <a:bodyPr rtlCol="0" anchor="ctr"/>
+          <a:lstStyle/>
+          <a:p>
+            <a:pPr algn="ctr"/>
+          </a:p>
+        </p:txBody>
+      </p:sp>
+      <p:sp>
+        <p:nvSpPr>
+          <p:cNvPr id="17" name="TextBox 16"/>
           <p:cNvSpPr txBox="1"/>
           <p:nvPr/>
         </p:nvSpPr>
@@ -7129,7 +7393,7 @@
       </p:sp>
       <p:sp>
         <p:nvSpPr>
-          <p:cNvPr id="16" name="TextBox 15"/>
+          <p:cNvPr id="18" name="TextBox 17"/>
           <p:cNvSpPr txBox="1"/>
           <p:nvPr/>
         </p:nvSpPr>
@@ -7168,7 +7432,7 @@
       </p:sp>
       <p:cxnSp>
         <p:nvCxnSpPr>
-          <p:cNvPr id="17" name="Connector 16"/>
+          <p:cNvPr id="19" name="Connector 18"/>
           <p:cNvCxnSpPr/>
           <p:nvPr/>
         </p:nvCxnSpPr>
@@ -7204,7 +7468,7 @@
       </p:cxnSp>
       <p:cxnSp>
         <p:nvCxnSpPr>
-          <p:cNvPr id="18" name="Connector 17"/>
+          <p:cNvPr id="20" name="Connector 19"/>
           <p:cNvCxnSpPr/>
           <p:nvPr/>
         </p:nvCxnSpPr>
@@ -7240,7 +7504,51 @@
       </p:cxnSp>
       <p:sp>
         <p:nvSpPr>
-          <p:cNvPr id="19" name="TextBox 18"/>
+          <p:cNvPr id="21" name="Rectangle 20"/>
+          <p:cNvSpPr/>
+          <p:nvPr/>
+        </p:nvSpPr>
+        <p:spPr>
+          <a:xfrm>
+            <a:off x="8790737" y="2994660"/>
+            <a:ext cx="68580" cy="68580"/>
+          </a:xfrm>
+          <a:prstGeom prst="rect">
+            <a:avLst/>
+          </a:prstGeom>
+          <a:solidFill>
+            <a:srgbClr val="00FF9C"/>
+          </a:solidFill>
+          <a:ln>
+            <a:noFill/>
+          </a:ln>
+          <a:effectLst/>
+        </p:spPr>
+        <p:style>
+          <a:lnRef idx="1">
+            <a:schemeClr val="accent1"/>
+          </a:lnRef>
+          <a:fillRef idx="3">
+            <a:schemeClr val="accent1"/>
+          </a:fillRef>
+          <a:effectRef idx="2">
+            <a:schemeClr val="accent1"/>
+          </a:effectRef>
+          <a:fontRef idx="minor">
+            <a:schemeClr val="lt1"/>
+          </a:fontRef>
+        </p:style>
+        <p:txBody>
+          <a:bodyPr rtlCol="0" anchor="ctr"/>
+          <a:lstStyle/>
+          <a:p>
+            <a:pPr algn="ctr"/>
+          </a:p>
+        </p:txBody>
+      </p:sp>
+      <p:sp>
+        <p:nvSpPr>
+          <p:cNvPr id="22" name="TextBox 21"/>
           <p:cNvSpPr txBox="1"/>
           <p:nvPr/>
         </p:nvSpPr>
@@ -7279,7 +7587,7 @@
       </p:sp>
       <p:sp>
         <p:nvSpPr>
-          <p:cNvPr id="20" name="TextBox 19"/>
+          <p:cNvPr id="23" name="TextBox 22"/>
           <p:cNvSpPr txBox="1"/>
           <p:nvPr/>
         </p:nvSpPr>
@@ -7318,7 +7626,7 @@
       </p:sp>
       <p:sp>
         <p:nvSpPr>
-          <p:cNvPr id="21" name="Rectangle 20"/>
+          <p:cNvPr id="24" name="Rectangle 23"/>
           <p:cNvSpPr/>
           <p:nvPr/>
         </p:nvSpPr>
@@ -7362,7 +7670,7 @@
       </p:sp>
       <p:sp>
         <p:nvSpPr>
-          <p:cNvPr id="22" name="TextBox 21"/>
+          <p:cNvPr id="25" name="TextBox 24"/>
           <p:cNvSpPr txBox="1"/>
           <p:nvPr/>
         </p:nvSpPr>
@@ -7405,7 +7713,7 @@
       </p:sp>
       <p:sp>
         <p:nvSpPr>
-          <p:cNvPr id="23" name="TextBox 22"/>
+          <p:cNvPr id="26" name="TextBox 25"/>
           <p:cNvSpPr txBox="1"/>
           <p:nvPr/>
         </p:nvSpPr>
@@ -8376,7 +8684,51 @@
       </p:sp>
       <p:sp>
         <p:nvSpPr>
-          <p:cNvPr id="12" name="TextBox 11"/>
+          <p:cNvPr id="12" name="Rectangle 11"/>
+          <p:cNvSpPr/>
+          <p:nvPr/>
+        </p:nvSpPr>
+        <p:spPr>
+          <a:xfrm>
+            <a:off x="2005965" y="3469005"/>
+            <a:ext cx="85725" cy="85725"/>
+          </a:xfrm>
+          <a:prstGeom prst="rect">
+            <a:avLst/>
+          </a:prstGeom>
+          <a:solidFill>
+            <a:srgbClr val="00FF9C"/>
+          </a:solidFill>
+          <a:ln>
+            <a:noFill/>
+          </a:ln>
+          <a:effectLst/>
+        </p:spPr>
+        <p:style>
+          <a:lnRef idx="1">
+            <a:schemeClr val="accent1"/>
+          </a:lnRef>
+          <a:fillRef idx="3">
+            <a:schemeClr val="accent1"/>
+          </a:fillRef>
+          <a:effectRef idx="2">
+            <a:schemeClr val="accent1"/>
+          </a:effectRef>
+          <a:fontRef idx="minor">
+            <a:schemeClr val="lt1"/>
+          </a:fontRef>
+        </p:style>
+        <p:txBody>
+          <a:bodyPr rtlCol="0" anchor="ctr"/>
+          <a:lstStyle/>
+          <a:p>
+            <a:pPr algn="ctr"/>
+          </a:p>
+        </p:txBody>
+      </p:sp>
+      <p:sp>
+        <p:nvSpPr>
+          <p:cNvPr id="13" name="TextBox 12"/>
           <p:cNvSpPr txBox="1"/>
           <p:nvPr/>
         </p:nvSpPr>
@@ -8415,7 +8767,7 @@
       </p:sp>
       <p:sp>
         <p:nvSpPr>
-          <p:cNvPr id="13" name="TextBox 12"/>
+          <p:cNvPr id="14" name="TextBox 13"/>
           <p:cNvSpPr txBox="1"/>
           <p:nvPr/>
         </p:nvSpPr>
@@ -8454,7 +8806,7 @@
       </p:sp>
       <p:sp>
         <p:nvSpPr>
-          <p:cNvPr id="14" name="Rectangle 13"/>
+          <p:cNvPr id="15" name="Rectangle 14"/>
           <p:cNvSpPr/>
           <p:nvPr/>
         </p:nvSpPr>
@@ -8498,7 +8850,7 @@
       </p:sp>
       <p:sp>
         <p:nvSpPr>
-          <p:cNvPr id="15" name="TextBox 14"/>
+          <p:cNvPr id="16" name="TextBox 15"/>
           <p:cNvSpPr txBox="1"/>
           <p:nvPr/>
         </p:nvSpPr>
@@ -8541,7 +8893,7 @@
       </p:sp>
       <p:sp>
         <p:nvSpPr>
-          <p:cNvPr id="16" name="TextBox 15"/>
+          <p:cNvPr id="17" name="TextBox 16"/>
           <p:cNvSpPr txBox="1"/>
           <p:nvPr/>
         </p:nvSpPr>
@@ -11590,7 +11942,51 @@
       </p:sp>
       <p:sp>
         <p:nvSpPr>
-          <p:cNvPr id="10" name="TextBox 9"/>
+          <p:cNvPr id="10" name="Rectangle 9"/>
+          <p:cNvSpPr/>
+          <p:nvPr/>
+        </p:nvSpPr>
+        <p:spPr>
+          <a:xfrm>
+            <a:off x="1714500" y="3314700"/>
+            <a:ext cx="68580" cy="68580"/>
+          </a:xfrm>
+          <a:prstGeom prst="rect">
+            <a:avLst/>
+          </a:prstGeom>
+          <a:solidFill>
+            <a:srgbClr val="00FF9C"/>
+          </a:solidFill>
+          <a:ln>
+            <a:noFill/>
+          </a:ln>
+          <a:effectLst/>
+        </p:spPr>
+        <p:style>
+          <a:lnRef idx="1">
+            <a:schemeClr val="accent1"/>
+          </a:lnRef>
+          <a:fillRef idx="3">
+            <a:schemeClr val="accent1"/>
+          </a:fillRef>
+          <a:effectRef idx="2">
+            <a:schemeClr val="accent1"/>
+          </a:effectRef>
+          <a:fontRef idx="minor">
+            <a:schemeClr val="lt1"/>
+          </a:fontRef>
+        </p:style>
+        <p:txBody>
+          <a:bodyPr rtlCol="0" anchor="ctr"/>
+          <a:lstStyle/>
+          <a:p>
+            <a:pPr algn="ctr"/>
+          </a:p>
+        </p:txBody>
+      </p:sp>
+      <p:sp>
+        <p:nvSpPr>
+          <p:cNvPr id="11" name="TextBox 10"/>
           <p:cNvSpPr txBox="1"/>
           <p:nvPr/>
         </p:nvSpPr>
@@ -11629,7 +12025,7 @@
       </p:sp>
       <p:sp>
         <p:nvSpPr>
-          <p:cNvPr id="11" name="TextBox 10"/>
+          <p:cNvPr id="12" name="TextBox 11"/>
           <p:cNvSpPr txBox="1"/>
           <p:nvPr/>
         </p:nvSpPr>
@@ -11668,7 +12064,7 @@
       </p:sp>
       <p:sp>
         <p:nvSpPr>
-          <p:cNvPr id="12" name="Rectangle 11"/>
+          <p:cNvPr id="13" name="Rectangle 12"/>
           <p:cNvSpPr/>
           <p:nvPr/>
         </p:nvSpPr>
@@ -11712,7 +12108,7 @@
       </p:sp>
       <p:sp>
         <p:nvSpPr>
-          <p:cNvPr id="13" name="Rectangle 12"/>
+          <p:cNvPr id="14" name="Rectangle 13"/>
           <p:cNvSpPr/>
           <p:nvPr/>
         </p:nvSpPr>
@@ -11758,7 +12154,7 @@
       </p:sp>
       <p:sp>
         <p:nvSpPr>
-          <p:cNvPr id="14" name="Oval 13"/>
+          <p:cNvPr id="15" name="Oval 14"/>
           <p:cNvSpPr/>
           <p:nvPr/>
         </p:nvSpPr>
@@ -11802,7 +12198,7 @@
       </p:sp>
       <p:sp>
         <p:nvSpPr>
-          <p:cNvPr id="15" name="Oval 14"/>
+          <p:cNvPr id="16" name="Oval 15"/>
           <p:cNvSpPr/>
           <p:nvPr/>
         </p:nvSpPr>
@@ -11846,7 +12242,7 @@
       </p:sp>
       <p:cxnSp>
         <p:nvCxnSpPr>
-          <p:cNvPr id="16" name="Connector 15"/>
+          <p:cNvPr id="17" name="Connector 16"/>
           <p:cNvCxnSpPr/>
           <p:nvPr/>
         </p:nvCxnSpPr>
@@ -11854,42 +12250,6 @@
           <a:xfrm>
             <a:off x="5332628" y="3063240"/>
             <a:ext cx="68580" cy="0"/>
-          </a:xfrm>
-          <a:prstGeom prst="line">
-            <a:avLst/>
-          </a:prstGeom>
-          <a:ln w="45720">
-            <a:solidFill>
-              <a:srgbClr val="000000"/>
-            </a:solidFill>
-          </a:ln>
-          <a:effectLst/>
-        </p:spPr>
-        <p:style>
-          <a:lnRef idx="2">
-            <a:schemeClr val="accent1"/>
-          </a:lnRef>
-          <a:fillRef idx="0">
-            <a:schemeClr val="accent1"/>
-          </a:fillRef>
-          <a:effectRef idx="1">
-            <a:schemeClr val="accent1"/>
-          </a:effectRef>
-          <a:fontRef idx="minor">
-            <a:schemeClr val="tx1"/>
-          </a:fontRef>
-        </p:style>
-      </p:cxnSp>
-      <p:cxnSp>
-        <p:nvCxnSpPr>
-          <p:cNvPr id="17" name="Connector 16"/>
-          <p:cNvCxnSpPr/>
-          <p:nvPr/>
-        </p:nvCxnSpPr>
-        <p:spPr>
-          <a:xfrm>
-            <a:off x="5161178" y="3234690"/>
-            <a:ext cx="0" cy="68580"/>
           </a:xfrm>
           <a:prstGeom prst="line">
             <a:avLst/>
@@ -11923,9 +12283,9 @@
           <p:nvPr/>
         </p:nvCxnSpPr>
         <p:spPr>
-          <a:xfrm flipH="1">
-            <a:off x="4921148" y="3063240"/>
-            <a:ext cx="68580" cy="0"/>
+          <a:xfrm>
+            <a:off x="5161178" y="3234690"/>
+            <a:ext cx="0" cy="68580"/>
           </a:xfrm>
           <a:prstGeom prst="line">
             <a:avLst/>
@@ -11959,9 +12319,9 @@
           <p:nvPr/>
         </p:nvCxnSpPr>
         <p:spPr>
-          <a:xfrm flipV="1">
-            <a:off x="5161178" y="2823210"/>
-            <a:ext cx="0" cy="68580"/>
+          <a:xfrm flipH="1">
+            <a:off x="4921148" y="3063240"/>
+            <a:ext cx="68580" cy="0"/>
           </a:xfrm>
           <a:prstGeom prst="line">
             <a:avLst/>
@@ -11995,9 +12355,9 @@
           <p:nvPr/>
         </p:nvCxnSpPr>
         <p:spPr>
-          <a:xfrm>
-            <a:off x="5282336" y="3184398"/>
-            <a:ext cx="50292" cy="50292"/>
+          <a:xfrm flipV="1">
+            <a:off x="5161178" y="2823210"/>
+            <a:ext cx="0" cy="68580"/>
           </a:xfrm>
           <a:prstGeom prst="line">
             <a:avLst/>
@@ -12031,8 +12391,8 @@
           <p:nvPr/>
         </p:nvCxnSpPr>
         <p:spPr>
-          <a:xfrm flipH="1">
-            <a:off x="4989728" y="3184398"/>
+          <a:xfrm>
+            <a:off x="5282336" y="3184398"/>
             <a:ext cx="50292" cy="50292"/>
           </a:xfrm>
           <a:prstGeom prst="line">
@@ -12067,8 +12427,8 @@
           <p:nvPr/>
         </p:nvCxnSpPr>
         <p:spPr>
-          <a:xfrm flipH="1" flipV="1">
-            <a:off x="4989728" y="2891790"/>
+          <a:xfrm flipH="1">
+            <a:off x="4989728" y="3184398"/>
             <a:ext cx="50292" cy="50292"/>
           </a:xfrm>
           <a:prstGeom prst="line">
@@ -12103,8 +12463,8 @@
           <p:nvPr/>
         </p:nvCxnSpPr>
         <p:spPr>
-          <a:xfrm flipV="1">
-            <a:off x="5282336" y="2891790"/>
+          <a:xfrm flipH="1" flipV="1">
+            <a:off x="4989728" y="2891790"/>
             <a:ext cx="50292" cy="50292"/>
           </a:xfrm>
           <a:prstGeom prst="line">
@@ -12132,9 +12492,89 @@
           </a:fontRef>
         </p:style>
       </p:cxnSp>
-      <p:sp>
-        <p:nvSpPr>
-          <p:cNvPr id="24" name="TextBox 23"/>
+      <p:cxnSp>
+        <p:nvCxnSpPr>
+          <p:cNvPr id="24" name="Connector 23"/>
+          <p:cNvCxnSpPr/>
+          <p:nvPr/>
+        </p:nvCxnSpPr>
+        <p:spPr>
+          <a:xfrm flipV="1">
+            <a:off x="5282336" y="2891790"/>
+            <a:ext cx="50292" cy="50292"/>
+          </a:xfrm>
+          <a:prstGeom prst="line">
+            <a:avLst/>
+          </a:prstGeom>
+          <a:ln w="45720">
+            <a:solidFill>
+              <a:srgbClr val="000000"/>
+            </a:solidFill>
+          </a:ln>
+          <a:effectLst/>
+        </p:spPr>
+        <p:style>
+          <a:lnRef idx="2">
+            <a:schemeClr val="accent1"/>
+          </a:lnRef>
+          <a:fillRef idx="0">
+            <a:schemeClr val="accent1"/>
+          </a:fillRef>
+          <a:effectRef idx="1">
+            <a:schemeClr val="accent1"/>
+          </a:effectRef>
+          <a:fontRef idx="minor">
+            <a:schemeClr val="tx1"/>
+          </a:fontRef>
+        </p:style>
+      </p:cxnSp>
+      <p:sp>
+        <p:nvSpPr>
+          <p:cNvPr id="25" name="Rectangle 24"/>
+          <p:cNvSpPr/>
+          <p:nvPr/>
+        </p:nvSpPr>
+        <p:spPr>
+          <a:xfrm>
+            <a:off x="5412638" y="3314700"/>
+            <a:ext cx="68580" cy="68580"/>
+          </a:xfrm>
+          <a:prstGeom prst="rect">
+            <a:avLst/>
+          </a:prstGeom>
+          <a:solidFill>
+            <a:srgbClr val="00FF9C"/>
+          </a:solidFill>
+          <a:ln>
+            <a:noFill/>
+          </a:ln>
+          <a:effectLst/>
+        </p:spPr>
+        <p:style>
+          <a:lnRef idx="1">
+            <a:schemeClr val="accent1"/>
+          </a:lnRef>
+          <a:fillRef idx="3">
+            <a:schemeClr val="accent1"/>
+          </a:fillRef>
+          <a:effectRef idx="2">
+            <a:schemeClr val="accent1"/>
+          </a:effectRef>
+          <a:fontRef idx="minor">
+            <a:schemeClr val="lt1"/>
+          </a:fontRef>
+        </p:style>
+        <p:txBody>
+          <a:bodyPr rtlCol="0" anchor="ctr"/>
+          <a:lstStyle/>
+          <a:p>
+            <a:pPr algn="ctr"/>
+          </a:p>
+        </p:txBody>
+      </p:sp>
+      <p:sp>
+        <p:nvSpPr>
+          <p:cNvPr id="26" name="TextBox 25"/>
           <p:cNvSpPr txBox="1"/>
           <p:nvPr/>
         </p:nvSpPr>
@@ -12173,7 +12613,7 @@
       </p:sp>
       <p:sp>
         <p:nvSpPr>
-          <p:cNvPr id="25" name="TextBox 24"/>
+          <p:cNvPr id="27" name="TextBox 26"/>
           <p:cNvSpPr txBox="1"/>
           <p:nvPr/>
         </p:nvSpPr>
@@ -12212,7 +12652,7 @@
       </p:sp>
       <p:sp>
         <p:nvSpPr>
-          <p:cNvPr id="26" name="Rectangle 25"/>
+          <p:cNvPr id="28" name="Rectangle 27"/>
           <p:cNvSpPr/>
           <p:nvPr/>
         </p:nvSpPr>
@@ -12256,7 +12696,7 @@
       </p:sp>
       <p:sp>
         <p:nvSpPr>
-          <p:cNvPr id="27" name="Rectangle 26"/>
+          <p:cNvPr id="29" name="Rectangle 28"/>
           <p:cNvSpPr/>
           <p:nvPr/>
         </p:nvSpPr>
@@ -12302,7 +12742,7 @@
       </p:sp>
       <p:sp>
         <p:nvSpPr>
-          <p:cNvPr id="28" name="Freeform 27"/>
+          <p:cNvPr id="30" name="Freeform 29"/>
           <p:cNvSpPr/>
           <p:nvPr/>
         </p:nvSpPr>
@@ -12370,7 +12810,7 @@
       </p:sp>
       <p:sp>
         <p:nvSpPr>
-          <p:cNvPr id="29" name="Freeform 28"/>
+          <p:cNvPr id="31" name="Freeform 30"/>
           <p:cNvSpPr/>
           <p:nvPr/>
         </p:nvSpPr>
@@ -12431,7 +12871,7 @@
       </p:sp>
       <p:sp>
         <p:nvSpPr>
-          <p:cNvPr id="30" name="Freeform 29"/>
+          <p:cNvPr id="32" name="Freeform 31"/>
           <p:cNvSpPr/>
           <p:nvPr/>
         </p:nvSpPr>
@@ -12492,7 +12932,7 @@
       </p:sp>
       <p:sp>
         <p:nvSpPr>
-          <p:cNvPr id="31" name="Oval 30"/>
+          <p:cNvPr id="33" name="Oval 32"/>
           <p:cNvSpPr/>
           <p:nvPr/>
         </p:nvSpPr>
@@ -12536,7 +12976,51 @@
       </p:sp>
       <p:sp>
         <p:nvSpPr>
-          <p:cNvPr id="32" name="TextBox 31"/>
+          <p:cNvPr id="34" name="Rectangle 33"/>
+          <p:cNvSpPr/>
+          <p:nvPr/>
+        </p:nvSpPr>
+        <p:spPr>
+          <a:xfrm>
+            <a:off x="9110777" y="3314700"/>
+            <a:ext cx="68580" cy="68580"/>
+          </a:xfrm>
+          <a:prstGeom prst="rect">
+            <a:avLst/>
+          </a:prstGeom>
+          <a:solidFill>
+            <a:srgbClr val="00FF9C"/>
+          </a:solidFill>
+          <a:ln>
+            <a:noFill/>
+          </a:ln>
+          <a:effectLst/>
+        </p:spPr>
+        <p:style>
+          <a:lnRef idx="1">
+            <a:schemeClr val="accent1"/>
+          </a:lnRef>
+          <a:fillRef idx="3">
+            <a:schemeClr val="accent1"/>
+          </a:fillRef>
+          <a:effectRef idx="2">
+            <a:schemeClr val="accent1"/>
+          </a:effectRef>
+          <a:fontRef idx="minor">
+            <a:schemeClr val="lt1"/>
+          </a:fontRef>
+        </p:style>
+        <p:txBody>
+          <a:bodyPr rtlCol="0" anchor="ctr"/>
+          <a:lstStyle/>
+          <a:p>
+            <a:pPr algn="ctr"/>
+          </a:p>
+        </p:txBody>
+      </p:sp>
+      <p:sp>
+        <p:nvSpPr>
+          <p:cNvPr id="35" name="TextBox 34"/>
           <p:cNvSpPr txBox="1"/>
           <p:nvPr/>
         </p:nvSpPr>
@@ -12575,7 +13059,7 @@
       </p:sp>
       <p:sp>
         <p:nvSpPr>
-          <p:cNvPr id="33" name="TextBox 32"/>
+          <p:cNvPr id="36" name="TextBox 35"/>
           <p:cNvSpPr txBox="1"/>
           <p:nvPr/>
         </p:nvSpPr>
@@ -12614,7 +13098,7 @@
       </p:sp>
       <p:sp>
         <p:nvSpPr>
-          <p:cNvPr id="34" name="Rectangle 33"/>
+          <p:cNvPr id="37" name="Rectangle 36"/>
           <p:cNvSpPr/>
           <p:nvPr/>
         </p:nvSpPr>
@@ -12658,7 +13142,7 @@
       </p:sp>
       <p:sp>
         <p:nvSpPr>
-          <p:cNvPr id="35" name="TextBox 34"/>
+          <p:cNvPr id="38" name="TextBox 37"/>
           <p:cNvSpPr txBox="1"/>
           <p:nvPr/>
         </p:nvSpPr>
@@ -12701,7 +13185,7 @@
       </p:sp>
       <p:sp>
         <p:nvSpPr>
-          <p:cNvPr id="36" name="TextBox 35"/>
+          <p:cNvPr id="39" name="TextBox 38"/>
           <p:cNvSpPr txBox="1"/>
           <p:nvPr/>
         </p:nvSpPr>
